--- a/Разработка мобильного приложения «ExpenseTracker».pptx
+++ b/Разработка мобильного приложения «ExpenseTracker».pptx
@@ -112,6 +112,11 @@
       </a:defRPr>
     </a:lvl9pPr>
   </p:defaultTextStyle>
+  <p:extLst>
+    <p:ext uri="{EFAFB233-063F-42B5-8137-9DF3F51BA10A}">
+      <p15:sldGuideLst xmlns:p15="http://schemas.microsoft.com/office/powerpoint/2012/main"/>
+    </p:ext>
+  </p:extLst>
 </p:presentation>
 </file>
 
@@ -3819,6 +3824,14 @@
 <file path=ppt/slides/slide1.xml><?xml version="1.0" encoding="utf-8"?>
 <p:sld xmlns:a="http://schemas.openxmlformats.org/drawingml/2006/main" xmlns:r="http://schemas.openxmlformats.org/officeDocument/2006/relationships" xmlns:p="http://schemas.openxmlformats.org/presentationml/2006/main">
   <p:cSld>
+    <p:bg>
+      <p:bgPr>
+        <a:solidFill>
+          <a:srgbClr val="774595"/>
+        </a:solidFill>
+        <a:effectLst/>
+      </p:bgPr>
+    </p:bg>
     <p:spTree>
       <p:nvGrpSpPr>
         <p:cNvPr id="1" name=""/>
@@ -3902,13 +3915,17 @@
           <a:lstStyle/>
           <a:p>
             <a:r>
-              <a:rPr lang="ru-RU" dirty="0"/>
+              <a:rPr lang="ru-RU" dirty="0">
+                <a:latin typeface="Aptos" panose="020B0004020202020204" pitchFamily="34" charset="0"/>
+              </a:rPr>
               <a:t>По МДК 01.03 Разработка мобильных приложений</a:t>
             </a:r>
           </a:p>
           <a:p>
             <a:r>
-              <a:rPr lang="ru-RU" dirty="0"/>
+              <a:rPr lang="ru-RU" dirty="0">
+                <a:latin typeface="Aptos" panose="020B0004020202020204" pitchFamily="34" charset="0"/>
+              </a:rPr>
               <a:t>Выполнил: Турсунов А.А. 331с</a:t>
             </a:r>
           </a:p>
@@ -3946,6 +3963,108 @@
       </p:grpSpPr>
       <p:sp>
         <p:nvSpPr>
+          <p:cNvPr id="5" name="Прямоугольник: скругленные углы 4">
+            <a:extLst>
+              <a:ext uri="{FF2B5EF4-FFF2-40B4-BE49-F238E27FC236}">
+                <a16:creationId xmlns:a16="http://schemas.microsoft.com/office/drawing/2014/main" id="{2F6F9AED-BB3B-5DE9-7D68-058FE7F39561}"/>
+              </a:ext>
+            </a:extLst>
+          </p:cNvPr>
+          <p:cNvSpPr/>
+          <p:nvPr/>
+        </p:nvSpPr>
+        <p:spPr>
+          <a:xfrm>
+            <a:off x="1827546" y="4469452"/>
+            <a:ext cx="8536907" cy="1375872"/>
+          </a:xfrm>
+          <a:prstGeom prst="roundRect">
+            <a:avLst/>
+          </a:prstGeom>
+          <a:solidFill>
+            <a:schemeClr val="accent1">
+              <a:lumMod val="50000"/>
+            </a:schemeClr>
+          </a:solidFill>
+        </p:spPr>
+        <p:style>
+          <a:lnRef idx="2">
+            <a:schemeClr val="accent1">
+              <a:shade val="15000"/>
+            </a:schemeClr>
+          </a:lnRef>
+          <a:fillRef idx="1">
+            <a:schemeClr val="accent1"/>
+          </a:fillRef>
+          <a:effectRef idx="0">
+            <a:schemeClr val="accent1"/>
+          </a:effectRef>
+          <a:fontRef idx="minor">
+            <a:schemeClr val="lt1"/>
+          </a:fontRef>
+        </p:style>
+        <p:txBody>
+          <a:bodyPr rtlCol="0" anchor="ctr"/>
+          <a:lstStyle/>
+          <a:p>
+            <a:pPr algn="ctr"/>
+            <a:endParaRPr lang="ru-RU"/>
+          </a:p>
+        </p:txBody>
+      </p:sp>
+      <p:sp>
+        <p:nvSpPr>
+          <p:cNvPr id="4" name="Прямоугольник: скругленные углы 3">
+            <a:extLst>
+              <a:ext uri="{FF2B5EF4-FFF2-40B4-BE49-F238E27FC236}">
+                <a16:creationId xmlns:a16="http://schemas.microsoft.com/office/drawing/2014/main" id="{63281966-B08A-A29D-EE66-06E4D378EF2E}"/>
+              </a:ext>
+            </a:extLst>
+          </p:cNvPr>
+          <p:cNvSpPr/>
+          <p:nvPr/>
+        </p:nvSpPr>
+        <p:spPr>
+          <a:xfrm>
+            <a:off x="1827546" y="1827364"/>
+            <a:ext cx="8536907" cy="2486826"/>
+          </a:xfrm>
+          <a:prstGeom prst="roundRect">
+            <a:avLst/>
+          </a:prstGeom>
+          <a:solidFill>
+            <a:schemeClr val="accent1">
+              <a:lumMod val="50000"/>
+            </a:schemeClr>
+          </a:solidFill>
+        </p:spPr>
+        <p:style>
+          <a:lnRef idx="2">
+            <a:schemeClr val="accent1">
+              <a:shade val="15000"/>
+            </a:schemeClr>
+          </a:lnRef>
+          <a:fillRef idx="1">
+            <a:schemeClr val="accent1"/>
+          </a:fillRef>
+          <a:effectRef idx="0">
+            <a:schemeClr val="accent1"/>
+          </a:effectRef>
+          <a:fontRef idx="minor">
+            <a:schemeClr val="lt1"/>
+          </a:fontRef>
+        </p:style>
+        <p:txBody>
+          <a:bodyPr rtlCol="0" anchor="ctr"/>
+          <a:lstStyle/>
+          <a:p>
+            <a:pPr algn="ctr"/>
+            <a:endParaRPr lang="ru-RU"/>
+          </a:p>
+        </p:txBody>
+      </p:sp>
+      <p:sp>
+        <p:nvSpPr>
           <p:cNvPr id="2" name="Заголовок 1">
             <a:extLst>
               <a:ext uri="{FF2B5EF4-FFF2-40B4-BE49-F238E27FC236}">
@@ -3973,7 +4092,7 @@
           <a:lstStyle/>
           <a:p>
             <a:r>
-              <a:rPr lang="ru-RU"/>
+              <a:rPr lang="ru-RU" b="1" dirty="0"/>
               <a:t>Зачем нужен еще один трекер?</a:t>
             </a:r>
           </a:p>
@@ -3997,7 +4116,7 @@
         </p:nvSpPr>
         <p:spPr>
           <a:xfrm>
-            <a:off x="1551403" y="1828800"/>
+            <a:off x="1893235" y="1917005"/>
             <a:ext cx="9089193" cy="3928319"/>
           </a:xfrm>
         </p:spPr>
@@ -4077,6 +4196,159 @@
       </p:grpSpPr>
       <p:sp>
         <p:nvSpPr>
+          <p:cNvPr id="6" name="Прямоугольник: скругленные углы 5">
+            <a:extLst>
+              <a:ext uri="{FF2B5EF4-FFF2-40B4-BE49-F238E27FC236}">
+                <a16:creationId xmlns:a16="http://schemas.microsoft.com/office/drawing/2014/main" id="{CF6CA700-7250-3502-C98C-BFB8726FA29A}"/>
+              </a:ext>
+            </a:extLst>
+          </p:cNvPr>
+          <p:cNvSpPr/>
+          <p:nvPr/>
+        </p:nvSpPr>
+        <p:spPr>
+          <a:xfrm>
+            <a:off x="1632587" y="4802738"/>
+            <a:ext cx="8536907" cy="1375872"/>
+          </a:xfrm>
+          <a:prstGeom prst="roundRect">
+            <a:avLst/>
+          </a:prstGeom>
+          <a:solidFill>
+            <a:schemeClr val="accent1">
+              <a:lumMod val="50000"/>
+            </a:schemeClr>
+          </a:solidFill>
+        </p:spPr>
+        <p:style>
+          <a:lnRef idx="2">
+            <a:schemeClr val="accent1">
+              <a:shade val="15000"/>
+            </a:schemeClr>
+          </a:lnRef>
+          <a:fillRef idx="1">
+            <a:schemeClr val="accent1"/>
+          </a:fillRef>
+          <a:effectRef idx="0">
+            <a:schemeClr val="accent1"/>
+          </a:effectRef>
+          <a:fontRef idx="minor">
+            <a:schemeClr val="lt1"/>
+          </a:fontRef>
+        </p:style>
+        <p:txBody>
+          <a:bodyPr rtlCol="0" anchor="ctr"/>
+          <a:lstStyle/>
+          <a:p>
+            <a:pPr algn="ctr"/>
+            <a:endParaRPr lang="ru-RU"/>
+          </a:p>
+        </p:txBody>
+      </p:sp>
+      <p:sp>
+        <p:nvSpPr>
+          <p:cNvPr id="4" name="Прямоугольник: скругленные углы 3">
+            <a:extLst>
+              <a:ext uri="{FF2B5EF4-FFF2-40B4-BE49-F238E27FC236}">
+                <a16:creationId xmlns:a16="http://schemas.microsoft.com/office/drawing/2014/main" id="{428A9526-1AB9-0AB6-A1B2-9FC414AAF686}"/>
+              </a:ext>
+            </a:extLst>
+          </p:cNvPr>
+          <p:cNvSpPr/>
+          <p:nvPr/>
+        </p:nvSpPr>
+        <p:spPr>
+          <a:xfrm>
+            <a:off x="1632588" y="1700614"/>
+            <a:ext cx="8536907" cy="1375872"/>
+          </a:xfrm>
+          <a:prstGeom prst="roundRect">
+            <a:avLst/>
+          </a:prstGeom>
+          <a:solidFill>
+            <a:schemeClr val="accent1">
+              <a:lumMod val="50000"/>
+            </a:schemeClr>
+          </a:solidFill>
+        </p:spPr>
+        <p:style>
+          <a:lnRef idx="2">
+            <a:schemeClr val="accent1">
+              <a:shade val="15000"/>
+            </a:schemeClr>
+          </a:lnRef>
+          <a:fillRef idx="1">
+            <a:schemeClr val="accent1"/>
+          </a:fillRef>
+          <a:effectRef idx="0">
+            <a:schemeClr val="accent1"/>
+          </a:effectRef>
+          <a:fontRef idx="minor">
+            <a:schemeClr val="lt1"/>
+          </a:fontRef>
+        </p:style>
+        <p:txBody>
+          <a:bodyPr rtlCol="0" anchor="ctr"/>
+          <a:lstStyle/>
+          <a:p>
+            <a:pPr algn="ctr"/>
+            <a:endParaRPr lang="ru-RU"/>
+          </a:p>
+        </p:txBody>
+      </p:sp>
+      <p:sp>
+        <p:nvSpPr>
+          <p:cNvPr id="5" name="Прямоугольник: скругленные углы 4">
+            <a:extLst>
+              <a:ext uri="{FF2B5EF4-FFF2-40B4-BE49-F238E27FC236}">
+                <a16:creationId xmlns:a16="http://schemas.microsoft.com/office/drawing/2014/main" id="{35E14DCF-95C7-E8DF-B4C4-B2B7CFB4070C}"/>
+              </a:ext>
+            </a:extLst>
+          </p:cNvPr>
+          <p:cNvSpPr/>
+          <p:nvPr/>
+        </p:nvSpPr>
+        <p:spPr>
+          <a:xfrm>
+            <a:off x="1632587" y="3226038"/>
+            <a:ext cx="8536907" cy="1375872"/>
+          </a:xfrm>
+          <a:prstGeom prst="roundRect">
+            <a:avLst/>
+          </a:prstGeom>
+          <a:solidFill>
+            <a:schemeClr val="accent1">
+              <a:lumMod val="50000"/>
+            </a:schemeClr>
+          </a:solidFill>
+        </p:spPr>
+        <p:style>
+          <a:lnRef idx="2">
+            <a:schemeClr val="accent1">
+              <a:shade val="15000"/>
+            </a:schemeClr>
+          </a:lnRef>
+          <a:fillRef idx="1">
+            <a:schemeClr val="accent1"/>
+          </a:fillRef>
+          <a:effectRef idx="0">
+            <a:schemeClr val="accent1"/>
+          </a:effectRef>
+          <a:fontRef idx="minor">
+            <a:schemeClr val="lt1"/>
+          </a:fontRef>
+        </p:style>
+        <p:txBody>
+          <a:bodyPr rtlCol="0" anchor="ctr"/>
+          <a:lstStyle/>
+          <a:p>
+            <a:pPr algn="ctr"/>
+            <a:endParaRPr lang="ru-RU"/>
+          </a:p>
+        </p:txBody>
+      </p:sp>
+      <p:sp>
+        <p:nvSpPr>
           <p:cNvPr id="2" name="Заголовок 1">
             <a:extLst>
               <a:ext uri="{FF2B5EF4-FFF2-40B4-BE49-F238E27FC236}">
@@ -4102,7 +4374,7 @@
           <a:lstStyle/>
           <a:p>
             <a:r>
-              <a:rPr lang="ru-RU"/>
+              <a:rPr lang="ru-RU" b="1" dirty="0"/>
               <a:t>Паспорт проекта</a:t>
             </a:r>
           </a:p>
@@ -4137,8 +4409,12 @@
           <a:lstStyle/>
           <a:p>
             <a:r>
+              <a:rPr lang="ru-RU" sz="2800" b="1" dirty="0"/>
+              <a:t>Цель</a:t>
+            </a:r>
+            <a:r>
               <a:rPr lang="ru-RU" sz="2800" dirty="0"/>
-              <a:t>Цель: Разработка </a:t>
+              <a:t>: Разработка </a:t>
             </a:r>
             <a:r>
               <a:rPr lang="ru-RU" sz="2800" dirty="0" err="1"/>
@@ -4154,8 +4430,12 @@
           </a:p>
           <a:p>
             <a:r>
+              <a:rPr lang="ru-RU" sz="2800" b="1" dirty="0"/>
+              <a:t>Объект</a:t>
+            </a:r>
+            <a:r>
               <a:rPr lang="ru-RU" sz="2800" dirty="0"/>
-              <a:t>Объект: Процесс управления личными финансовыми средствами.</a:t>
+              <a:t>: Процесс управления личными финансовыми средствами.</a:t>
             </a:r>
           </a:p>
           <a:p>
@@ -4163,8 +4443,12 @@
           </a:p>
           <a:p>
             <a:r>
+              <a:rPr lang="ru-RU" sz="2800" b="1" dirty="0"/>
+              <a:t>Предмет</a:t>
+            </a:r>
+            <a:r>
               <a:rPr lang="ru-RU" sz="2800" dirty="0"/>
-              <a:t>Предмет: Программные алгоритмы и архитектурные решения под ОС </a:t>
+              <a:t>: Программные алгоритмы и архитектурные решения под ОС </a:t>
             </a:r>
             <a:r>
               <a:rPr lang="ru-RU" sz="2800" dirty="0" err="1"/>
@@ -4209,6 +4493,57 @@
       </p:grpSpPr>
       <p:sp>
         <p:nvSpPr>
+          <p:cNvPr id="4" name="Прямоугольник: скругленные углы 3">
+            <a:extLst>
+              <a:ext uri="{FF2B5EF4-FFF2-40B4-BE49-F238E27FC236}">
+                <a16:creationId xmlns:a16="http://schemas.microsoft.com/office/drawing/2014/main" id="{4163F2FB-86B0-727A-DE12-35947B4A926A}"/>
+              </a:ext>
+            </a:extLst>
+          </p:cNvPr>
+          <p:cNvSpPr/>
+          <p:nvPr/>
+        </p:nvSpPr>
+        <p:spPr>
+          <a:xfrm>
+            <a:off x="743484" y="1726249"/>
+            <a:ext cx="4760008" cy="4119073"/>
+          </a:xfrm>
+          <a:prstGeom prst="roundRect">
+            <a:avLst/>
+          </a:prstGeom>
+          <a:solidFill>
+            <a:schemeClr val="accent1">
+              <a:lumMod val="50000"/>
+            </a:schemeClr>
+          </a:solidFill>
+        </p:spPr>
+        <p:style>
+          <a:lnRef idx="2">
+            <a:schemeClr val="accent1">
+              <a:shade val="15000"/>
+            </a:schemeClr>
+          </a:lnRef>
+          <a:fillRef idx="1">
+            <a:schemeClr val="accent1"/>
+          </a:fillRef>
+          <a:effectRef idx="0">
+            <a:schemeClr val="accent1"/>
+          </a:effectRef>
+          <a:fontRef idx="minor">
+            <a:schemeClr val="lt1"/>
+          </a:fontRef>
+        </p:style>
+        <p:txBody>
+          <a:bodyPr rtlCol="0" anchor="ctr"/>
+          <a:lstStyle/>
+          <a:p>
+            <a:pPr algn="ctr"/>
+            <a:endParaRPr lang="ru-RU"/>
+          </a:p>
+        </p:txBody>
+      </p:sp>
+      <p:sp>
+        <p:nvSpPr>
           <p:cNvPr id="2" name="Заголовок 1">
             <a:extLst>
               <a:ext uri="{FF2B5EF4-FFF2-40B4-BE49-F238E27FC236}">
@@ -4234,7 +4569,7 @@
           <a:lstStyle/>
           <a:p>
             <a:r>
-              <a:rPr lang="ru-RU" dirty="0"/>
+              <a:rPr lang="ru-RU" b="1" dirty="0"/>
               <a:t>Особенности Приложения</a:t>
             </a:r>
           </a:p>
@@ -4363,6 +4698,108 @@
       </p:grpSpPr>
       <p:sp>
         <p:nvSpPr>
+          <p:cNvPr id="6" name="Прямоугольник: скругленные углы 5">
+            <a:extLst>
+              <a:ext uri="{FF2B5EF4-FFF2-40B4-BE49-F238E27FC236}">
+                <a16:creationId xmlns:a16="http://schemas.microsoft.com/office/drawing/2014/main" id="{62037572-FF03-0C6D-CD9A-A39BDC4A5CE2}"/>
+              </a:ext>
+            </a:extLst>
+          </p:cNvPr>
+          <p:cNvSpPr/>
+          <p:nvPr/>
+        </p:nvSpPr>
+        <p:spPr>
+          <a:xfrm>
+            <a:off x="6272613" y="1726249"/>
+            <a:ext cx="5563311" cy="2307366"/>
+          </a:xfrm>
+          <a:prstGeom prst="roundRect">
+            <a:avLst/>
+          </a:prstGeom>
+          <a:solidFill>
+            <a:schemeClr val="accent1">
+              <a:lumMod val="50000"/>
+            </a:schemeClr>
+          </a:solidFill>
+        </p:spPr>
+        <p:style>
+          <a:lnRef idx="2">
+            <a:schemeClr val="accent1">
+              <a:shade val="15000"/>
+            </a:schemeClr>
+          </a:lnRef>
+          <a:fillRef idx="1">
+            <a:schemeClr val="accent1"/>
+          </a:fillRef>
+          <a:effectRef idx="0">
+            <a:schemeClr val="accent1"/>
+          </a:effectRef>
+          <a:fontRef idx="minor">
+            <a:schemeClr val="lt1"/>
+          </a:fontRef>
+        </p:style>
+        <p:txBody>
+          <a:bodyPr rtlCol="0" anchor="ctr"/>
+          <a:lstStyle/>
+          <a:p>
+            <a:pPr algn="ctr"/>
+            <a:endParaRPr lang="ru-RU"/>
+          </a:p>
+        </p:txBody>
+      </p:sp>
+      <p:sp>
+        <p:nvSpPr>
+          <p:cNvPr id="5" name="Прямоугольник: скругленные углы 4">
+            <a:extLst>
+              <a:ext uri="{FF2B5EF4-FFF2-40B4-BE49-F238E27FC236}">
+                <a16:creationId xmlns:a16="http://schemas.microsoft.com/office/drawing/2014/main" id="{6357D7B7-1C27-6315-84A2-0CBC804F6723}"/>
+              </a:ext>
+            </a:extLst>
+          </p:cNvPr>
+          <p:cNvSpPr/>
+          <p:nvPr/>
+        </p:nvSpPr>
+        <p:spPr>
+          <a:xfrm>
+            <a:off x="179461" y="1726250"/>
+            <a:ext cx="5093293" cy="2238998"/>
+          </a:xfrm>
+          <a:prstGeom prst="roundRect">
+            <a:avLst/>
+          </a:prstGeom>
+          <a:solidFill>
+            <a:schemeClr val="accent1">
+              <a:lumMod val="50000"/>
+            </a:schemeClr>
+          </a:solidFill>
+        </p:spPr>
+        <p:style>
+          <a:lnRef idx="2">
+            <a:schemeClr val="accent1">
+              <a:shade val="15000"/>
+            </a:schemeClr>
+          </a:lnRef>
+          <a:fillRef idx="1">
+            <a:schemeClr val="accent1"/>
+          </a:fillRef>
+          <a:effectRef idx="0">
+            <a:schemeClr val="accent1"/>
+          </a:effectRef>
+          <a:fontRef idx="minor">
+            <a:schemeClr val="lt1"/>
+          </a:fontRef>
+        </p:style>
+        <p:txBody>
+          <a:bodyPr rtlCol="0" anchor="ctr"/>
+          <a:lstStyle/>
+          <a:p>
+            <a:pPr algn="ctr"/>
+            <a:endParaRPr lang="ru-RU"/>
+          </a:p>
+        </p:txBody>
+      </p:sp>
+      <p:sp>
+        <p:nvSpPr>
           <p:cNvPr id="2" name="Заголовок 1">
             <a:extLst>
               <a:ext uri="{FF2B5EF4-FFF2-40B4-BE49-F238E27FC236}">
@@ -4390,7 +4827,7 @@
           <a:lstStyle/>
           <a:p>
             <a:r>
-              <a:rPr lang="ru-RU" dirty="0"/>
+              <a:rPr lang="ru-RU" b="1" dirty="0"/>
               <a:t>Технологический стек</a:t>
             </a:r>
           </a:p>
@@ -4414,7 +4851,7 @@
         </p:nvSpPr>
         <p:spPr>
           <a:xfrm>
-            <a:off x="479276" y="1825625"/>
+            <a:off x="479274" y="1957322"/>
             <a:ext cx="5181600" cy="4351338"/>
           </a:xfrm>
         </p:spPr>
@@ -4545,6 +4982,57 @@
       </p:grpSpPr>
       <p:sp>
         <p:nvSpPr>
+          <p:cNvPr id="4" name="Прямоугольник: скругленные углы 3">
+            <a:extLst>
+              <a:ext uri="{FF2B5EF4-FFF2-40B4-BE49-F238E27FC236}">
+                <a16:creationId xmlns:a16="http://schemas.microsoft.com/office/drawing/2014/main" id="{E07C5947-A582-3AEB-FD2A-C8DD42C16A70}"/>
+              </a:ext>
+            </a:extLst>
+          </p:cNvPr>
+          <p:cNvSpPr/>
+          <p:nvPr/>
+        </p:nvSpPr>
+        <p:spPr>
+          <a:xfrm>
+            <a:off x="131748" y="1743341"/>
+            <a:ext cx="5950721" cy="2649196"/>
+          </a:xfrm>
+          <a:prstGeom prst="roundRect">
+            <a:avLst/>
+          </a:prstGeom>
+          <a:solidFill>
+            <a:schemeClr val="accent1">
+              <a:lumMod val="50000"/>
+            </a:schemeClr>
+          </a:solidFill>
+        </p:spPr>
+        <p:style>
+          <a:lnRef idx="2">
+            <a:schemeClr val="accent1">
+              <a:shade val="15000"/>
+            </a:schemeClr>
+          </a:lnRef>
+          <a:fillRef idx="1">
+            <a:schemeClr val="accent1"/>
+          </a:fillRef>
+          <a:effectRef idx="0">
+            <a:schemeClr val="accent1"/>
+          </a:effectRef>
+          <a:fontRef idx="minor">
+            <a:schemeClr val="lt1"/>
+          </a:fontRef>
+        </p:style>
+        <p:txBody>
+          <a:bodyPr rtlCol="0" anchor="ctr"/>
+          <a:lstStyle/>
+          <a:p>
+            <a:pPr algn="ctr"/>
+            <a:endParaRPr lang="ru-RU"/>
+          </a:p>
+        </p:txBody>
+      </p:sp>
+      <p:sp>
+        <p:nvSpPr>
           <p:cNvPr id="2" name="Заголовок 1">
             <a:extLst>
               <a:ext uri="{FF2B5EF4-FFF2-40B4-BE49-F238E27FC236}">
@@ -4570,7 +5058,7 @@
           <a:lstStyle/>
           <a:p>
             <a:r>
-              <a:rPr lang="ru-RU"/>
+              <a:rPr lang="ru-RU" b="1" dirty="0"/>
               <a:t>Визуализация и Аналитика</a:t>
             </a:r>
           </a:p>
@@ -4696,6 +5184,57 @@
       </p:grpSpPr>
       <p:sp>
         <p:nvSpPr>
+          <p:cNvPr id="4" name="Прямоугольник: скругленные углы 3">
+            <a:extLst>
+              <a:ext uri="{FF2B5EF4-FFF2-40B4-BE49-F238E27FC236}">
+                <a16:creationId xmlns:a16="http://schemas.microsoft.com/office/drawing/2014/main" id="{8A2F7B57-839C-E491-5FC7-843426D9A982}"/>
+              </a:ext>
+            </a:extLst>
+          </p:cNvPr>
+          <p:cNvSpPr/>
+          <p:nvPr/>
+        </p:nvSpPr>
+        <p:spPr>
+          <a:xfrm>
+            <a:off x="213644" y="1746086"/>
+            <a:ext cx="5181599" cy="3116471"/>
+          </a:xfrm>
+          <a:prstGeom prst="roundRect">
+            <a:avLst/>
+          </a:prstGeom>
+          <a:solidFill>
+            <a:schemeClr val="accent1">
+              <a:lumMod val="50000"/>
+            </a:schemeClr>
+          </a:solidFill>
+        </p:spPr>
+        <p:style>
+          <a:lnRef idx="2">
+            <a:schemeClr val="accent1">
+              <a:shade val="15000"/>
+            </a:schemeClr>
+          </a:lnRef>
+          <a:fillRef idx="1">
+            <a:schemeClr val="accent1"/>
+          </a:fillRef>
+          <a:effectRef idx="0">
+            <a:schemeClr val="accent1"/>
+          </a:effectRef>
+          <a:fontRef idx="minor">
+            <a:schemeClr val="lt1"/>
+          </a:fontRef>
+        </p:style>
+        <p:txBody>
+          <a:bodyPr rtlCol="0" anchor="ctr"/>
+          <a:lstStyle/>
+          <a:p>
+            <a:pPr algn="ctr"/>
+            <a:endParaRPr lang="ru-RU"/>
+          </a:p>
+        </p:txBody>
+      </p:sp>
+      <p:sp>
+        <p:nvSpPr>
           <p:cNvPr id="2" name="Заголовок 1">
             <a:extLst>
               <a:ext uri="{FF2B5EF4-FFF2-40B4-BE49-F238E27FC236}">
@@ -4721,7 +5260,7 @@
           <a:lstStyle/>
           <a:p>
             <a:r>
-              <a:rPr lang="ru-RU" dirty="0"/>
+              <a:rPr lang="ru-RU" b="1" dirty="0"/>
               <a:t>Геймификация и План</a:t>
             </a:r>
           </a:p>
@@ -4857,6 +5396,57 @@
       </p:grpSpPr>
       <p:sp>
         <p:nvSpPr>
+          <p:cNvPr id="4" name="Прямоугольник: скругленные углы 3">
+            <a:extLst>
+              <a:ext uri="{FF2B5EF4-FFF2-40B4-BE49-F238E27FC236}">
+                <a16:creationId xmlns:a16="http://schemas.microsoft.com/office/drawing/2014/main" id="{93EBAE50-826B-40DA-60C1-E1DE72CB7BBB}"/>
+              </a:ext>
+            </a:extLst>
+          </p:cNvPr>
+          <p:cNvSpPr/>
+          <p:nvPr/>
+        </p:nvSpPr>
+        <p:spPr>
+          <a:xfrm>
+            <a:off x="1375872" y="2050990"/>
+            <a:ext cx="9033988" cy="3341405"/>
+          </a:xfrm>
+          <a:prstGeom prst="roundRect">
+            <a:avLst/>
+          </a:prstGeom>
+          <a:solidFill>
+            <a:schemeClr val="accent1">
+              <a:lumMod val="50000"/>
+            </a:schemeClr>
+          </a:solidFill>
+        </p:spPr>
+        <p:style>
+          <a:lnRef idx="2">
+            <a:schemeClr val="accent1">
+              <a:shade val="15000"/>
+            </a:schemeClr>
+          </a:lnRef>
+          <a:fillRef idx="1">
+            <a:schemeClr val="accent1"/>
+          </a:fillRef>
+          <a:effectRef idx="0">
+            <a:schemeClr val="accent1"/>
+          </a:effectRef>
+          <a:fontRef idx="minor">
+            <a:schemeClr val="lt1"/>
+          </a:fontRef>
+        </p:style>
+        <p:txBody>
+          <a:bodyPr rtlCol="0" anchor="ctr"/>
+          <a:lstStyle/>
+          <a:p>
+            <a:pPr algn="ctr"/>
+            <a:endParaRPr lang="ru-RU"/>
+          </a:p>
+        </p:txBody>
+      </p:sp>
+      <p:sp>
+        <p:nvSpPr>
           <p:cNvPr id="2" name="Заголовок 1">
             <a:extLst>
               <a:ext uri="{FF2B5EF4-FFF2-40B4-BE49-F238E27FC236}">
@@ -4882,7 +5472,7 @@
           <a:lstStyle/>
           <a:p>
             <a:r>
-              <a:rPr lang="ru-RU" dirty="0"/>
+              <a:rPr lang="ru-RU" b="1" dirty="0"/>
               <a:t>Итоги работы</a:t>
             </a:r>
           </a:p>
@@ -4957,6 +5547,14 @@
 <file path=ppt/slides/slide9.xml><?xml version="1.0" encoding="utf-8"?>
 <p:sld xmlns:a="http://schemas.openxmlformats.org/drawingml/2006/main" xmlns:r="http://schemas.openxmlformats.org/officeDocument/2006/relationships" xmlns:p="http://schemas.openxmlformats.org/presentationml/2006/main">
   <p:cSld>
+    <p:bg>
+      <p:bgPr>
+        <a:solidFill>
+          <a:srgbClr val="774595"/>
+        </a:solidFill>
+        <a:effectLst/>
+      </p:bgPr>
+    </p:bg>
     <p:spTree>
       <p:nvGrpSpPr>
         <p:cNvPr id="1" name=""/>
@@ -4987,7 +5585,12 @@
             <p:ph type="ctrTitle"/>
           </p:nvPr>
         </p:nvSpPr>
-        <p:spPr/>
+        <p:spPr>
+          <a:xfrm>
+            <a:off x="1600200" y="710344"/>
+            <a:ext cx="8991600" cy="1645920"/>
+          </a:xfrm>
+        </p:spPr>
         <p:txBody>
           <a:bodyPr/>
           <a:lstStyle/>
@@ -4996,6 +5599,86 @@
               <a:rPr lang="ru-RU"/>
               <a:t>Спасибо за внимание!</a:t>
             </a:r>
+          </a:p>
+        </p:txBody>
+      </p:sp>
+      <p:pic>
+        <p:nvPicPr>
+          <p:cNvPr id="4" name="Рисунок 3" descr="Изображение выглядит как шаблон, Симметрия, прямоугольный, пиксель&#10;&#10;Контент, сгенерированный ИИ, может содержать ошибки.">
+            <a:extLst>
+              <a:ext uri="{FF2B5EF4-FFF2-40B4-BE49-F238E27FC236}">
+                <a16:creationId xmlns:a16="http://schemas.microsoft.com/office/drawing/2014/main" id="{47B8C99F-A018-E405-AC39-FF1B7A466231}"/>
+              </a:ext>
+            </a:extLst>
+          </p:cNvPr>
+          <p:cNvPicPr>
+            <a:picLocks noChangeAspect="1"/>
+          </p:cNvPicPr>
+          <p:nvPr/>
+        </p:nvPicPr>
+        <p:blipFill>
+          <a:blip r:embed="rId2">
+            <a:extLst>
+              <a:ext uri="{28A0092B-C50C-407E-A947-70E740481C1C}">
+                <a14:useLocalDpi xmlns:a14="http://schemas.microsoft.com/office/drawing/2010/main" val="0"/>
+              </a:ext>
+            </a:extLst>
+          </a:blip>
+          <a:stretch>
+            <a:fillRect/>
+          </a:stretch>
+        </p:blipFill>
+        <p:spPr>
+          <a:xfrm>
+            <a:off x="4492831" y="3570506"/>
+            <a:ext cx="3053937" cy="3053937"/>
+          </a:xfrm>
+          <a:prstGeom prst="rect">
+            <a:avLst/>
+          </a:prstGeom>
+        </p:spPr>
+      </p:pic>
+      <p:sp>
+        <p:nvSpPr>
+          <p:cNvPr id="5" name="TextBox 4">
+            <a:extLst>
+              <a:ext uri="{FF2B5EF4-FFF2-40B4-BE49-F238E27FC236}">
+                <a16:creationId xmlns:a16="http://schemas.microsoft.com/office/drawing/2014/main" id="{A477F2BC-D051-685F-DB71-7113815E9A26}"/>
+              </a:ext>
+            </a:extLst>
+          </p:cNvPr>
+          <p:cNvSpPr txBox="1"/>
+          <p:nvPr/>
+        </p:nvSpPr>
+        <p:spPr>
+          <a:xfrm>
+            <a:off x="4757736" y="2640219"/>
+            <a:ext cx="2524125" cy="646331"/>
+          </a:xfrm>
+          <a:prstGeom prst="rect">
+            <a:avLst/>
+          </a:prstGeom>
+          <a:noFill/>
+        </p:spPr>
+        <p:txBody>
+          <a:bodyPr wrap="square" rtlCol="0">
+            <a:spAutoFit/>
+          </a:bodyPr>
+          <a:lstStyle/>
+          <a:p>
+            <a:r>
+              <a:rPr lang="en-US" dirty="0"/>
+              <a:t>QR-</a:t>
+            </a:r>
+            <a:r>
+              <a:rPr lang="ru-RU" dirty="0"/>
+              <a:t>код репозитория на </a:t>
+            </a:r>
+            <a:r>
+              <a:rPr lang="ru-RU" dirty="0" err="1"/>
+              <a:t>ГитХабе</a:t>
+            </a:r>
+            <a:endParaRPr lang="ru-RU" dirty="0"/>
           </a:p>
         </p:txBody>
       </p:sp>

--- a/Разработка мобильного приложения «ExpenseTracker».pptx
+++ b/Разработка мобильного приложения «ExpenseTracker».pptx
@@ -283,7 +283,7 @@
           <a:p>
             <a:fld id="{05773D14-EC23-4C37-AE7B-52C5E968F335}" type="datetimeFigureOut">
               <a:rPr lang="ru-RU" smtClean="0"/>
-              <a:t>01.04.2026</a:t>
+              <a:t>02.04.2026</a:t>
             </a:fld>
             <a:endParaRPr lang="ru-RU"/>
           </a:p>
@@ -453,7 +453,7 @@
           <a:p>
             <a:fld id="{05773D14-EC23-4C37-AE7B-52C5E968F335}" type="datetimeFigureOut">
               <a:rPr lang="ru-RU" smtClean="0"/>
-              <a:t>01.04.2026</a:t>
+              <a:t>02.04.2026</a:t>
             </a:fld>
             <a:endParaRPr lang="ru-RU"/>
           </a:p>
@@ -633,7 +633,7 @@
           <a:p>
             <a:fld id="{05773D14-EC23-4C37-AE7B-52C5E968F335}" type="datetimeFigureOut">
               <a:rPr lang="ru-RU" smtClean="0"/>
-              <a:t>01.04.2026</a:t>
+              <a:t>02.04.2026</a:t>
             </a:fld>
             <a:endParaRPr lang="ru-RU"/>
           </a:p>
@@ -819,7 +819,7 @@
           <a:p>
             <a:fld id="{05773D14-EC23-4C37-AE7B-52C5E968F335}" type="datetimeFigureOut">
               <a:rPr lang="ru-RU" smtClean="0"/>
-              <a:t>01.04.2026</a:t>
+              <a:t>02.04.2026</a:t>
             </a:fld>
             <a:endParaRPr lang="ru-RU"/>
           </a:p>
@@ -1140,7 +1140,7 @@
           <a:p>
             <a:fld id="{05773D14-EC23-4C37-AE7B-52C5E968F335}" type="datetimeFigureOut">
               <a:rPr lang="ru-RU" smtClean="0"/>
-              <a:t>01.04.2026</a:t>
+              <a:t>02.04.2026</a:t>
             </a:fld>
             <a:endParaRPr lang="ru-RU"/>
           </a:p>
@@ -1322,7 +1322,7 @@
           <a:p>
             <a:fld id="{05773D14-EC23-4C37-AE7B-52C5E968F335}" type="datetimeFigureOut">
               <a:rPr lang="ru-RU" smtClean="0"/>
-              <a:t>01.04.2026</a:t>
+              <a:t>02.04.2026</a:t>
             </a:fld>
             <a:endParaRPr lang="ru-RU"/>
           </a:p>
@@ -1590,7 +1590,7 @@
           <a:p>
             <a:fld id="{05773D14-EC23-4C37-AE7B-52C5E968F335}" type="datetimeFigureOut">
               <a:rPr lang="ru-RU" smtClean="0"/>
-              <a:t>01.04.2026</a:t>
+              <a:t>02.04.2026</a:t>
             </a:fld>
             <a:endParaRPr lang="ru-RU"/>
           </a:p>
@@ -1822,7 +1822,7 @@
           <a:p>
             <a:fld id="{05773D14-EC23-4C37-AE7B-52C5E968F335}" type="datetimeFigureOut">
               <a:rPr lang="ru-RU" smtClean="0"/>
-              <a:t>01.04.2026</a:t>
+              <a:t>02.04.2026</a:t>
             </a:fld>
             <a:endParaRPr lang="ru-RU"/>
           </a:p>
@@ -2177,7 +2177,7 @@
           <a:p>
             <a:fld id="{05773D14-EC23-4C37-AE7B-52C5E968F335}" type="datetimeFigureOut">
               <a:rPr lang="ru-RU" smtClean="0"/>
-              <a:t>01.04.2026</a:t>
+              <a:t>02.04.2026</a:t>
             </a:fld>
             <a:endParaRPr lang="ru-RU"/>
           </a:p>
@@ -2318,7 +2318,7 @@
           <a:p>
             <a:fld id="{05773D14-EC23-4C37-AE7B-52C5E968F335}" type="datetimeFigureOut">
               <a:rPr lang="ru-RU" smtClean="0"/>
-              <a:t>01.04.2026</a:t>
+              <a:t>02.04.2026</a:t>
             </a:fld>
             <a:endParaRPr lang="ru-RU"/>
           </a:p>
@@ -2413,7 +2413,7 @@
           <a:p>
             <a:fld id="{05773D14-EC23-4C37-AE7B-52C5E968F335}" type="datetimeFigureOut">
               <a:rPr lang="ru-RU" smtClean="0"/>
-              <a:t>01.04.2026</a:t>
+              <a:t>02.04.2026</a:t>
             </a:fld>
             <a:endParaRPr lang="ru-RU"/>
           </a:p>
@@ -2775,7 +2775,7 @@
           <a:p>
             <a:fld id="{05773D14-EC23-4C37-AE7B-52C5E968F335}" type="datetimeFigureOut">
               <a:rPr lang="ru-RU" smtClean="0"/>
-              <a:t>01.04.2026</a:t>
+              <a:t>02.04.2026</a:t>
             </a:fld>
             <a:endParaRPr lang="ru-RU"/>
           </a:p>
@@ -3137,7 +3137,7 @@
           <a:p>
             <a:fld id="{05773D14-EC23-4C37-AE7B-52C5E968F335}" type="datetimeFigureOut">
               <a:rPr lang="ru-RU" smtClean="0"/>
-              <a:t>01.04.2026</a:t>
+              <a:t>02.04.2026</a:t>
             </a:fld>
             <a:endParaRPr lang="ru-RU"/>
           </a:p>
@@ -3381,7 +3381,7 @@
           <a:p>
             <a:fld id="{05773D14-EC23-4C37-AE7B-52C5E968F335}" type="datetimeFigureOut">
               <a:rPr lang="ru-RU" smtClean="0"/>
-              <a:t>01.04.2026</a:t>
+              <a:t>02.04.2026</a:t>
             </a:fld>
             <a:endParaRPr lang="ru-RU"/>
           </a:p>
@@ -4659,6 +4659,11 @@
           <a:ln>
             <a:noFill/>
           </a:ln>
+          <a:effectLst>
+            <a:glow rad="127000">
+              <a:schemeClr val="accent1"/>
+            </a:glow>
+          </a:effectLst>
           <a:extLst>
             <a:ext uri="{53640926-AAD7-44D8-BBD7-CCE9431645EC}">
               <a14:shadowObscured xmlns:a14="http://schemas.microsoft.com/office/drawing/2010/main"/>
@@ -5145,6 +5150,11 @@
           <a:ln>
             <a:noFill/>
           </a:ln>
+          <a:effectLst>
+            <a:glow rad="127000">
+              <a:schemeClr val="accent1"/>
+            </a:glow>
+          </a:effectLst>
           <a:extLst>
             <a:ext uri="{53640926-AAD7-44D8-BBD7-CCE9431645EC}">
               <a14:shadowObscured xmlns:a14="http://schemas.microsoft.com/office/drawing/2010/main"/>
@@ -5357,6 +5367,11 @@
           <a:ln>
             <a:noFill/>
           </a:ln>
+          <a:effectLst>
+            <a:glow rad="127000">
+              <a:schemeClr val="accent1"/>
+            </a:glow>
+          </a:effectLst>
           <a:extLst>
             <a:ext uri="{53640926-AAD7-44D8-BBD7-CCE9431645EC}">
               <a14:shadowObscured xmlns:a14="http://schemas.microsoft.com/office/drawing/2010/main"/>
@@ -5636,6 +5651,11 @@
           <a:prstGeom prst="rect">
             <a:avLst/>
           </a:prstGeom>
+          <a:effectLst>
+            <a:glow rad="127000">
+              <a:schemeClr val="accent1"/>
+            </a:glow>
+          </a:effectLst>
         </p:spPr>
       </p:pic>
       <p:sp>
